--- a/frontend/public/docs/ImperiumAI_Presentation.pptx
+++ b/frontend/public/docs/ImperiumAI_Presentation.pptx
@@ -2124,7 +2124,7 @@
               <a:buNone/>
             </a:pPr>
             <a:r>
-              <a:rPr lang="en-US" sz="5800" b="1" dirty="0">
+              <a:rPr lang="en-US" sz="5800" b="1" dirty="0" err="1">
                 <a:solidFill>
                   <a:srgbClr val="FFFFFF"/>
                 </a:solidFill>
@@ -2165,7 +2165,7 @@
               </a:lnSpc>
             </a:pPr>
             <a:r>
-              <a:rPr lang="en-US" sz="2100" dirty="0">
+              <a:rPr lang="ru-KZ" sz="2100" dirty="0">
                 <a:solidFill>
                   <a:schemeClr val="accent5">
                     <a:lumMod val="40000"/>
@@ -2175,8 +2175,252 @@
                 <a:latin typeface="Arial" panose="020B0604020202020204" pitchFamily="34" charset="0"/>
                 <a:cs typeface="Arial" panose="020B0604020202020204" pitchFamily="34" charset="0"/>
               </a:rPr>
-              <a:t>Development of an AI-Based Red Teaming Framework for Testing LLMs Integrated into Smart Home and IoT Systems</a:t>
-            </a:r>
+              <a:t>Development </a:t>
+            </a:r>
+            <a:r>
+              <a:rPr lang="ru-KZ" sz="2100" dirty="0" err="1">
+                <a:solidFill>
+                  <a:schemeClr val="accent5">
+                    <a:lumMod val="40000"/>
+                    <a:lumOff val="60000"/>
+                  </a:schemeClr>
+                </a:solidFill>
+                <a:latin typeface="Arial" panose="020B0604020202020204" pitchFamily="34" charset="0"/>
+                <a:cs typeface="Arial" panose="020B0604020202020204" pitchFamily="34" charset="0"/>
+              </a:rPr>
+              <a:t>of</a:t>
+            </a:r>
+            <a:r>
+              <a:rPr lang="ru-KZ" sz="2100" dirty="0">
+                <a:solidFill>
+                  <a:schemeClr val="accent5">
+                    <a:lumMod val="40000"/>
+                    <a:lumOff val="60000"/>
+                  </a:schemeClr>
+                </a:solidFill>
+                <a:latin typeface="Arial" panose="020B0604020202020204" pitchFamily="34" charset="0"/>
+                <a:cs typeface="Arial" panose="020B0604020202020204" pitchFamily="34" charset="0"/>
+              </a:rPr>
+              <a:t> </a:t>
+            </a:r>
+            <a:r>
+              <a:rPr lang="ru-KZ" sz="2100" dirty="0" err="1">
+                <a:solidFill>
+                  <a:schemeClr val="accent5">
+                    <a:lumMod val="40000"/>
+                    <a:lumOff val="60000"/>
+                  </a:schemeClr>
+                </a:solidFill>
+                <a:latin typeface="Arial" panose="020B0604020202020204" pitchFamily="34" charset="0"/>
+                <a:cs typeface="Arial" panose="020B0604020202020204" pitchFamily="34" charset="0"/>
+              </a:rPr>
+              <a:t>an</a:t>
+            </a:r>
+            <a:r>
+              <a:rPr lang="ru-KZ" sz="2100" dirty="0">
+                <a:solidFill>
+                  <a:schemeClr val="accent5">
+                    <a:lumMod val="40000"/>
+                    <a:lumOff val="60000"/>
+                  </a:schemeClr>
+                </a:solidFill>
+                <a:latin typeface="Arial" panose="020B0604020202020204" pitchFamily="34" charset="0"/>
+                <a:cs typeface="Arial" panose="020B0604020202020204" pitchFamily="34" charset="0"/>
+              </a:rPr>
+              <a:t> AI-Based Red </a:t>
+            </a:r>
+            <a:r>
+              <a:rPr lang="ru-KZ" sz="2100" dirty="0" err="1">
+                <a:solidFill>
+                  <a:schemeClr val="accent5">
+                    <a:lumMod val="40000"/>
+                    <a:lumOff val="60000"/>
+                  </a:schemeClr>
+                </a:solidFill>
+                <a:latin typeface="Arial" panose="020B0604020202020204" pitchFamily="34" charset="0"/>
+                <a:cs typeface="Arial" panose="020B0604020202020204" pitchFamily="34" charset="0"/>
+              </a:rPr>
+              <a:t>Teaming</a:t>
+            </a:r>
+            <a:r>
+              <a:rPr lang="ru-KZ" sz="2100" dirty="0">
+                <a:solidFill>
+                  <a:schemeClr val="accent5">
+                    <a:lumMod val="40000"/>
+                    <a:lumOff val="60000"/>
+                  </a:schemeClr>
+                </a:solidFill>
+                <a:latin typeface="Arial" panose="020B0604020202020204" pitchFamily="34" charset="0"/>
+                <a:cs typeface="Arial" panose="020B0604020202020204" pitchFamily="34" charset="0"/>
+              </a:rPr>
+              <a:t> Framework </a:t>
+            </a:r>
+            <a:r>
+              <a:rPr lang="ru-KZ" sz="2100" dirty="0" err="1">
+                <a:solidFill>
+                  <a:schemeClr val="accent5">
+                    <a:lumMod val="40000"/>
+                    <a:lumOff val="60000"/>
+                  </a:schemeClr>
+                </a:solidFill>
+                <a:latin typeface="Arial" panose="020B0604020202020204" pitchFamily="34" charset="0"/>
+                <a:cs typeface="Arial" panose="020B0604020202020204" pitchFamily="34" charset="0"/>
+              </a:rPr>
+              <a:t>for</a:t>
+            </a:r>
+            <a:r>
+              <a:rPr lang="ru-KZ" sz="2100" dirty="0">
+                <a:solidFill>
+                  <a:schemeClr val="accent5">
+                    <a:lumMod val="40000"/>
+                    <a:lumOff val="60000"/>
+                  </a:schemeClr>
+                </a:solidFill>
+                <a:latin typeface="Arial" panose="020B0604020202020204" pitchFamily="34" charset="0"/>
+                <a:cs typeface="Arial" panose="020B0604020202020204" pitchFamily="34" charset="0"/>
+              </a:rPr>
+              <a:t> </a:t>
+            </a:r>
+            <a:r>
+              <a:rPr lang="ru-KZ" sz="2100" dirty="0" err="1">
+                <a:solidFill>
+                  <a:schemeClr val="accent5">
+                    <a:lumMod val="40000"/>
+                    <a:lumOff val="60000"/>
+                  </a:schemeClr>
+                </a:solidFill>
+                <a:latin typeface="Arial" panose="020B0604020202020204" pitchFamily="34" charset="0"/>
+                <a:cs typeface="Arial" panose="020B0604020202020204" pitchFamily="34" charset="0"/>
+              </a:rPr>
+              <a:t>Testing</a:t>
+            </a:r>
+            <a:r>
+              <a:rPr lang="ru-KZ" sz="2100" dirty="0">
+                <a:solidFill>
+                  <a:schemeClr val="accent5">
+                    <a:lumMod val="40000"/>
+                    <a:lumOff val="60000"/>
+                  </a:schemeClr>
+                </a:solidFill>
+                <a:latin typeface="Arial" panose="020B0604020202020204" pitchFamily="34" charset="0"/>
+                <a:cs typeface="Arial" panose="020B0604020202020204" pitchFamily="34" charset="0"/>
+              </a:rPr>
+              <a:t> </a:t>
+            </a:r>
+            <a:r>
+              <a:rPr lang="ru-KZ" sz="2100" dirty="0" err="1">
+                <a:solidFill>
+                  <a:schemeClr val="accent5">
+                    <a:lumMod val="40000"/>
+                    <a:lumOff val="60000"/>
+                  </a:schemeClr>
+                </a:solidFill>
+                <a:latin typeface="Arial" panose="020B0604020202020204" pitchFamily="34" charset="0"/>
+                <a:cs typeface="Arial" panose="020B0604020202020204" pitchFamily="34" charset="0"/>
+              </a:rPr>
+              <a:t>LLMs</a:t>
+            </a:r>
+            <a:r>
+              <a:rPr lang="ru-KZ" sz="2100" dirty="0">
+                <a:solidFill>
+                  <a:schemeClr val="accent5">
+                    <a:lumMod val="40000"/>
+                    <a:lumOff val="60000"/>
+                  </a:schemeClr>
+                </a:solidFill>
+                <a:latin typeface="Arial" panose="020B0604020202020204" pitchFamily="34" charset="0"/>
+                <a:cs typeface="Arial" panose="020B0604020202020204" pitchFamily="34" charset="0"/>
+              </a:rPr>
+              <a:t> Integrated </a:t>
+            </a:r>
+            <a:r>
+              <a:rPr lang="ru-KZ" sz="2100" dirty="0" err="1">
+                <a:solidFill>
+                  <a:schemeClr val="accent5">
+                    <a:lumMod val="40000"/>
+                    <a:lumOff val="60000"/>
+                  </a:schemeClr>
+                </a:solidFill>
+                <a:latin typeface="Arial" panose="020B0604020202020204" pitchFamily="34" charset="0"/>
+                <a:cs typeface="Arial" panose="020B0604020202020204" pitchFamily="34" charset="0"/>
+              </a:rPr>
+              <a:t>into</a:t>
+            </a:r>
+            <a:r>
+              <a:rPr lang="ru-KZ" sz="2100" dirty="0">
+                <a:solidFill>
+                  <a:schemeClr val="accent5">
+                    <a:lumMod val="40000"/>
+                    <a:lumOff val="60000"/>
+                  </a:schemeClr>
+                </a:solidFill>
+                <a:latin typeface="Arial" panose="020B0604020202020204" pitchFamily="34" charset="0"/>
+                <a:cs typeface="Arial" panose="020B0604020202020204" pitchFamily="34" charset="0"/>
+              </a:rPr>
+              <a:t> Smart Home </a:t>
+            </a:r>
+            <a:r>
+              <a:rPr lang="ru-KZ" sz="2100" dirty="0" err="1">
+                <a:solidFill>
+                  <a:schemeClr val="accent5">
+                    <a:lumMod val="40000"/>
+                    <a:lumOff val="60000"/>
+                  </a:schemeClr>
+                </a:solidFill>
+                <a:latin typeface="Arial" panose="020B0604020202020204" pitchFamily="34" charset="0"/>
+                <a:cs typeface="Arial" panose="020B0604020202020204" pitchFamily="34" charset="0"/>
+              </a:rPr>
+              <a:t>and</a:t>
+            </a:r>
+            <a:r>
+              <a:rPr lang="ru-KZ" sz="2100" dirty="0">
+                <a:solidFill>
+                  <a:schemeClr val="accent5">
+                    <a:lumMod val="40000"/>
+                    <a:lumOff val="60000"/>
+                  </a:schemeClr>
+                </a:solidFill>
+                <a:latin typeface="Arial" panose="020B0604020202020204" pitchFamily="34" charset="0"/>
+                <a:cs typeface="Arial" panose="020B0604020202020204" pitchFamily="34" charset="0"/>
+              </a:rPr>
+              <a:t> </a:t>
+            </a:r>
+            <a:r>
+              <a:rPr lang="ru-KZ" sz="2100" dirty="0" err="1">
+                <a:solidFill>
+                  <a:schemeClr val="accent5">
+                    <a:lumMod val="40000"/>
+                    <a:lumOff val="60000"/>
+                  </a:schemeClr>
+                </a:solidFill>
+                <a:latin typeface="Arial" panose="020B0604020202020204" pitchFamily="34" charset="0"/>
+                <a:cs typeface="Arial" panose="020B0604020202020204" pitchFamily="34" charset="0"/>
+              </a:rPr>
+              <a:t>IoT</a:t>
+            </a:r>
+            <a:r>
+              <a:rPr lang="ru-KZ" sz="2100" dirty="0">
+                <a:solidFill>
+                  <a:schemeClr val="accent5">
+                    <a:lumMod val="40000"/>
+                    <a:lumOff val="60000"/>
+                  </a:schemeClr>
+                </a:solidFill>
+                <a:latin typeface="Arial" panose="020B0604020202020204" pitchFamily="34" charset="0"/>
+                <a:cs typeface="Arial" panose="020B0604020202020204" pitchFamily="34" charset="0"/>
+              </a:rPr>
+              <a:t> Systems</a:t>
+            </a:r>
+            <a:endParaRPr lang="en-US" sz="2100" dirty="0">
+              <a:solidFill>
+                <a:schemeClr val="accent5">
+                  <a:lumMod val="40000"/>
+                  <a:lumOff val="60000"/>
+                </a:schemeClr>
+              </a:solidFill>
+              <a:latin typeface="Arial" panose="020B0604020202020204" pitchFamily="34" charset="0"/>
+              <a:cs typeface="Arial" panose="020B0604020202020204" pitchFamily="34" charset="0"/>
+            </a:endParaRPr>
           </a:p>
         </p:txBody>
       </p:sp>
@@ -14816,7 +15060,99 @@
                 <a:ea typeface="Courier New" pitchFamily="34" charset="-122"/>
                 <a:cs typeface="Courier New" pitchFamily="34" charset="-120"/>
               </a:rPr>
-              <a:t>GPT-4o · Gemini · Claude · Mistral</a:t>
+              <a:t>OpenAI · Gemini · </a:t>
+            </a:r>
+            <a:r>
+              <a:rPr lang="en-US" sz="1100" dirty="0" err="1">
+                <a:solidFill>
+                  <a:srgbClr val="334155"/>
+                </a:solidFill>
+                <a:latin typeface="Courier New" pitchFamily="34" charset="0"/>
+                <a:ea typeface="Courier New" pitchFamily="34" charset="-122"/>
+                <a:cs typeface="Courier New" pitchFamily="34" charset="-120"/>
+              </a:rPr>
+              <a:t>Groq</a:t>
+            </a:r>
+            <a:r>
+              <a:rPr lang="en-US" sz="1100" dirty="0">
+                <a:solidFill>
+                  <a:srgbClr val="334155"/>
+                </a:solidFill>
+                <a:latin typeface="Courier New" pitchFamily="34" charset="0"/>
+                <a:ea typeface="Courier New" pitchFamily="34" charset="-122"/>
+                <a:cs typeface="Courier New" pitchFamily="34" charset="-120"/>
+              </a:rPr>
+              <a:t> · </a:t>
+            </a:r>
+            <a:r>
+              <a:rPr lang="en-US" sz="1100" dirty="0" err="1">
+                <a:solidFill>
+                  <a:srgbClr val="334155"/>
+                </a:solidFill>
+                <a:latin typeface="Courier New" pitchFamily="34" charset="0"/>
+                <a:ea typeface="Courier New" pitchFamily="34" charset="-122"/>
+                <a:cs typeface="Courier New" pitchFamily="34" charset="-120"/>
+              </a:rPr>
+              <a:t>Deepseek</a:t>
+            </a:r>
+            <a:endParaRPr lang="en-US" sz="1100" dirty="0">
+              <a:solidFill>
+                <a:srgbClr val="334155"/>
+              </a:solidFill>
+              <a:latin typeface="Courier New" pitchFamily="34" charset="0"/>
+              <a:ea typeface="Courier New" pitchFamily="34" charset="-122"/>
+              <a:cs typeface="Courier New" pitchFamily="34" charset="-120"/>
+            </a:endParaRPr>
+          </a:p>
+          <a:p>
+            <a:pPr>
+              <a:spcAft>
+                <a:spcPts val="800"/>
+              </a:spcAft>
+            </a:pPr>
+            <a:r>
+              <a:rPr lang="en-US" sz="1100" dirty="0">
+                <a:solidFill>
+                  <a:srgbClr val="334155"/>
+                </a:solidFill>
+                <a:latin typeface="Courier New" pitchFamily="34" charset="0"/>
+                <a:ea typeface="Courier New" pitchFamily="34" charset="-122"/>
+                <a:cs typeface="Courier New" pitchFamily="34" charset="-120"/>
+              </a:rPr>
+              <a:t>· </a:t>
+            </a:r>
+            <a:r>
+              <a:rPr lang="en-US" sz="1100" dirty="0" err="1">
+                <a:solidFill>
+                  <a:srgbClr val="334155"/>
+                </a:solidFill>
+                <a:latin typeface="Courier New" pitchFamily="34" charset="0"/>
+                <a:ea typeface="Courier New" pitchFamily="34" charset="-122"/>
+                <a:cs typeface="Courier New" pitchFamily="34" charset="-120"/>
+              </a:rPr>
+              <a:t>OpenRouter</a:t>
+            </a:r>
+            <a:r>
+              <a:rPr lang="en-US" sz="1100" dirty="0">
+                <a:solidFill>
+                  <a:srgbClr val="334155"/>
+                </a:solidFill>
+                <a:latin typeface="Courier New" pitchFamily="34" charset="0"/>
+                <a:ea typeface="Courier New" pitchFamily="34" charset="-122"/>
+                <a:cs typeface="Courier New" pitchFamily="34" charset="-120"/>
+              </a:rPr>
+              <a:t> · </a:t>
+            </a:r>
+            <a:r>
+              <a:rPr lang="en-US" sz="1100" dirty="0" err="1">
+                <a:solidFill>
+                  <a:srgbClr val="334155"/>
+                </a:solidFill>
+                <a:latin typeface="Courier New" pitchFamily="34" charset="0"/>
+                <a:ea typeface="Courier New" pitchFamily="34" charset="-122"/>
+                <a:cs typeface="Courier New" pitchFamily="34" charset="-120"/>
+              </a:rPr>
+              <a:t>SimulationClient</a:t>
             </a:r>
             <a:endParaRPr lang="en-US" sz="1100" dirty="0"/>
           </a:p>
@@ -16390,7 +16726,95 @@
                 <a:ea typeface="Arial" pitchFamily="34" charset="-122"/>
                 <a:cs typeface="Arial" pitchFamily="34" charset="-120"/>
               </a:rPr>
-              <a:t>6 providers: GPT-4o, Gemini, Claude, Mistral, Groq, SimulationClient. Strategy + Factory pattern.</a:t>
+              <a:t>6 providers: OpenAI, </a:t>
+            </a:r>
+            <a:r>
+              <a:rPr lang="en-US" sz="960" dirty="0" err="1">
+                <a:solidFill>
+                  <a:srgbClr val="64748B"/>
+                </a:solidFill>
+                <a:latin typeface="Arial" pitchFamily="34" charset="0"/>
+                <a:ea typeface="Arial" pitchFamily="34" charset="-122"/>
+                <a:cs typeface="Arial" pitchFamily="34" charset="-120"/>
+              </a:rPr>
+              <a:t>Deepseek</a:t>
+            </a:r>
+            <a:r>
+              <a:rPr lang="en-US" sz="960" dirty="0">
+                <a:solidFill>
+                  <a:srgbClr val="64748B"/>
+                </a:solidFill>
+                <a:latin typeface="Arial" pitchFamily="34" charset="0"/>
+                <a:ea typeface="Arial" pitchFamily="34" charset="-122"/>
+                <a:cs typeface="Arial" pitchFamily="34" charset="-120"/>
+              </a:rPr>
+              <a:t>, </a:t>
+            </a:r>
+            <a:r>
+              <a:rPr lang="en-US" sz="960" dirty="0" err="1">
+                <a:solidFill>
+                  <a:srgbClr val="64748B"/>
+                </a:solidFill>
+                <a:latin typeface="Arial" pitchFamily="34" charset="0"/>
+                <a:ea typeface="Arial" pitchFamily="34" charset="-122"/>
+                <a:cs typeface="Arial" pitchFamily="34" charset="-120"/>
+              </a:rPr>
+              <a:t>OpenRouter</a:t>
+            </a:r>
+            <a:r>
+              <a:rPr lang="en-US" sz="960" dirty="0">
+                <a:solidFill>
+                  <a:srgbClr val="64748B"/>
+                </a:solidFill>
+                <a:latin typeface="Arial" pitchFamily="34" charset="0"/>
+                <a:ea typeface="Arial" pitchFamily="34" charset="-122"/>
+                <a:cs typeface="Arial" pitchFamily="34" charset="-120"/>
+              </a:rPr>
+              <a:t>, Gemini, </a:t>
+            </a:r>
+            <a:r>
+              <a:rPr lang="en-US" sz="960" dirty="0" err="1">
+                <a:solidFill>
+                  <a:srgbClr val="64748B"/>
+                </a:solidFill>
+                <a:latin typeface="Arial" pitchFamily="34" charset="0"/>
+                <a:ea typeface="Arial" pitchFamily="34" charset="-122"/>
+                <a:cs typeface="Arial" pitchFamily="34" charset="-120"/>
+              </a:rPr>
+              <a:t>Groq</a:t>
+            </a:r>
+            <a:r>
+              <a:rPr lang="en-US" sz="960" dirty="0">
+                <a:solidFill>
+                  <a:srgbClr val="64748B"/>
+                </a:solidFill>
+                <a:latin typeface="Arial" pitchFamily="34" charset="0"/>
+                <a:ea typeface="Arial" pitchFamily="34" charset="-122"/>
+                <a:cs typeface="Arial" pitchFamily="34" charset="-120"/>
+              </a:rPr>
+              <a:t>, </a:t>
+            </a:r>
+            <a:r>
+              <a:rPr lang="en-US" sz="960" dirty="0" err="1">
+                <a:solidFill>
+                  <a:srgbClr val="64748B"/>
+                </a:solidFill>
+                <a:latin typeface="Arial" pitchFamily="34" charset="0"/>
+                <a:ea typeface="Arial" pitchFamily="34" charset="-122"/>
+                <a:cs typeface="Arial" pitchFamily="34" charset="-120"/>
+              </a:rPr>
+              <a:t>SimulationClient</a:t>
+            </a:r>
+            <a:r>
+              <a:rPr lang="en-US" sz="960" dirty="0">
+                <a:solidFill>
+                  <a:srgbClr val="64748B"/>
+                </a:solidFill>
+                <a:latin typeface="Arial" pitchFamily="34" charset="0"/>
+                <a:ea typeface="Arial" pitchFamily="34" charset="-122"/>
+                <a:cs typeface="Arial" pitchFamily="34" charset="-120"/>
+              </a:rPr>
+              <a:t>. Strategy + Factory pattern.</a:t>
             </a:r>
             <a:endParaRPr lang="en-US" sz="960" dirty="0"/>
           </a:p>
